--- a/skills/alignhcm-brand-system/assets/templates/Align-HCM-Primary-Deck-Reference.pptx
+++ b/skills/alignhcm-brand-system/assets/templates/Align-HCM-Primary-Deck-Reference.pptx
@@ -3813,7 +3813,7 @@
                 </a:solidFill>
                 <a:latin typeface="Calibri"/>
               </a:rPr>
-              <a:t>{{CLIENT}} is bringing approximately {{COUNT}} employees onto {{CLIENT}}'s existing {{TARGET_PLATFORM}} environment, migrating them off {{SOURCE_PLATFORM}}.</a:t>
+              <a:t>{{CLIENT}} is bringing approximately {{COUNT}} employees onto the existing {{TARGET_PLATFORM}} environment, migrating them off {{SOURCE_PLATFORM}}.</a:t>
             </a:r>
           </a:p>
         </p:txBody>
@@ -4005,7 +4005,7 @@
                 </a:solidFill>
                 <a:latin typeface="Calibri"/>
               </a:rPr>
-              <a:t>{{CLIENT}}'s {{COUNT}} employees move from {{SOURCE_PLATFORM}} onto {{CLIENT}}'s existing {{TARGET_PLATFORM}} environment.</a:t>
+              <a:t>{{COUNT}} employees at {{CLIENT}} move from {{SOURCE_PLATFORM}} onto the existing {{TARGET_PLATFORM}} environment.</a:t>
             </a:r>
           </a:p>
         </p:txBody>
@@ -4197,7 +4197,7 @@
                 </a:solidFill>
                 <a:latin typeface="Calibri"/>
               </a:rPr>
-              <a:t>{{CLIENT}} employees will be set up under {{CLIENT}}'s existing business rules, pay rules, and accrual rules already in production.</a:t>
+              <a:t>{{CLIENT}} employees will be set up under the existing business rules, pay rules, and accrual rules already in production.</a:t>
             </a:r>
           </a:p>
         </p:txBody>
@@ -6779,7 +6779,7 @@
                           </a:solidFill>
                           <a:latin typeface="Calibri"/>
                         </a:rPr>
-                        <a:t>Validate {{CLIENT}} population against {{CLIENT}}'s existing business, pay, and accrual rules; confirm component company structure</a:t>
+                        <a:t>Validate the {{CLIENT}} population against existing business, pay, and accrual rules; confirm component company structure</a:t>
                       </a:r>
                     </a:p>
                   </a:txBody>
@@ -10337,7 +10337,7 @@
                 </a:solidFill>
                 <a:latin typeface="Calibri"/>
               </a:rPr>
-              <a:t>{{CLIENT}}'s team confirms that {{CLIENT}} employees fit existing business rules, validates converted data, and supports UAT sign-off. AlignHCM leads configuration, data conversion, and testing coordination.</a:t>
+              <a:t>The {{CLIENT}} team confirms that {{CLIENT}} employees fit existing business rules, validates converted data, and supports UAT sign-off. AlignHCM leads configuration, data conversion, and testing coordination.</a:t>
             </a:r>
           </a:p>
         </p:txBody>
